--- a/slides/20260623.pptx
+++ b/slides/20260623.pptx
@@ -6,11 +6,13 @@
   </p:sldMasterIdLst>
   <p:sldIdLst>
     <p:sldId id="259" r:id="rId2"/>
-    <p:sldId id="261" r:id="rId3"/>
-    <p:sldId id="257" r:id="rId4"/>
-    <p:sldId id="256" r:id="rId5"/>
-    <p:sldId id="260" r:id="rId6"/>
-    <p:sldId id="258" r:id="rId7"/>
+    <p:sldId id="262" r:id="rId3"/>
+    <p:sldId id="261" r:id="rId4"/>
+    <p:sldId id="263" r:id="rId5"/>
+    <p:sldId id="257" r:id="rId6"/>
+    <p:sldId id="256" r:id="rId7"/>
+    <p:sldId id="260" r:id="rId8"/>
+    <p:sldId id="258" r:id="rId9"/>
   </p:sldIdLst>
   <p:sldSz cx="12192000" cy="6858000"/>
   <p:notesSz cx="6858000" cy="9144000"/>
@@ -3438,6 +3440,156 @@
         <p:cNvPr id="1" name="">
           <a:extLst>
             <a:ext uri="{FF2B5EF4-FFF2-40B4-BE49-F238E27FC236}">
+              <a16:creationId xmlns:a16="http://schemas.microsoft.com/office/drawing/2014/main" id="{34FB5F35-AA81-A4F6-0C67-9D824F6B9431}"/>
+            </a:ext>
+          </a:extLst>
+        </p:cNvPr>
+        <p:cNvGrpSpPr/>
+        <p:nvPr/>
+      </p:nvGrpSpPr>
+      <p:grpSpPr>
+        <a:xfrm>
+          <a:off x="0" y="0"/>
+          <a:ext cx="0" cy="0"/>
+          <a:chOff x="0" y="0"/>
+          <a:chExt cx="0" cy="0"/>
+        </a:xfrm>
+      </p:grpSpPr>
+      <p:sp>
+        <p:nvSpPr>
+          <p:cNvPr id="2" name="文本框 1">
+            <a:extLst>
+              <a:ext uri="{FF2B5EF4-FFF2-40B4-BE49-F238E27FC236}">
+                <a16:creationId xmlns:a16="http://schemas.microsoft.com/office/drawing/2014/main" id="{43A604F0-D1A4-A280-275F-10E9E95E7A80}"/>
+              </a:ext>
+            </a:extLst>
+          </p:cNvPr>
+          <p:cNvSpPr txBox="1"/>
+          <p:nvPr/>
+        </p:nvSpPr>
+        <p:spPr>
+          <a:xfrm>
+            <a:off x="421342" y="277906"/>
+            <a:ext cx="11376211" cy="2246769"/>
+          </a:xfrm>
+          <a:prstGeom prst="rect">
+            <a:avLst/>
+          </a:prstGeom>
+          <a:noFill/>
+        </p:spPr>
+        <p:txBody>
+          <a:bodyPr wrap="square" rtlCol="0">
+            <a:spAutoFit/>
+          </a:bodyPr>
+          <a:lstStyle/>
+          <a:p>
+            <a:r>
+              <a:rPr lang="en-US" altLang="zh-CN" sz="2000" dirty="0" err="1">
+                <a:latin typeface="Calibri" panose="020F0502020204030204" pitchFamily="34" charset="0"/>
+                <a:ea typeface="Calibri" panose="020F0502020204030204" pitchFamily="34" charset="0"/>
+                <a:cs typeface="Calibri" panose="020F0502020204030204" pitchFamily="34" charset="0"/>
+              </a:rPr>
+              <a:t>LeetCode</a:t>
+            </a:r>
+            <a:r>
+              <a:rPr lang="en-US" altLang="zh-CN" sz="2000" dirty="0">
+                <a:latin typeface="Calibri" panose="020F0502020204030204" pitchFamily="34" charset="0"/>
+                <a:ea typeface="Calibri" panose="020F0502020204030204" pitchFamily="34" charset="0"/>
+                <a:cs typeface="Calibri" panose="020F0502020204030204" pitchFamily="34" charset="0"/>
+              </a:rPr>
+              <a:t> dataset:</a:t>
+            </a:r>
+          </a:p>
+          <a:p>
+            <a:endParaRPr lang="en-US" altLang="zh-CN" sz="2000" dirty="0">
+              <a:latin typeface="Calibri" panose="020F0502020204030204" pitchFamily="34" charset="0"/>
+              <a:ea typeface="Calibri" panose="020F0502020204030204" pitchFamily="34" charset="0"/>
+              <a:cs typeface="Calibri" panose="020F0502020204030204" pitchFamily="34" charset="0"/>
+            </a:endParaRPr>
+          </a:p>
+          <a:p>
+            <a:pPr marL="342900" indent="-342900">
+              <a:buFont typeface="Arial" panose="020B0604020202020204" pitchFamily="34" charset="0"/>
+              <a:buChar char="•"/>
+            </a:pPr>
+            <a:r>
+              <a:rPr lang="en-US" altLang="zh-CN" sz="2000" dirty="0">
+                <a:latin typeface="Calibri" panose="020F0502020204030204" pitchFamily="34" charset="0"/>
+                <a:ea typeface="Calibri" panose="020F0502020204030204" pitchFamily="34" charset="0"/>
+                <a:cs typeface="Calibri" panose="020F0502020204030204" pitchFamily="34" charset="0"/>
+              </a:rPr>
+              <a:t>Randomly sampled 200 samples from here: </a:t>
+            </a:r>
+            <a:r>
+              <a:rPr lang="en-US" altLang="zh-CN" sz="2000" dirty="0">
+                <a:latin typeface="Calibri" panose="020F0502020204030204" pitchFamily="34" charset="0"/>
+                <a:ea typeface="Calibri" panose="020F0502020204030204" pitchFamily="34" charset="0"/>
+                <a:cs typeface="Calibri" panose="020F0502020204030204" pitchFamily="34" charset="0"/>
+                <a:hlinkClick r:id="rId2" tooltip="https://huggingface.co/datasets/newfacade/leetcodedataset"/>
+              </a:rPr>
+              <a:t>https://huggingface.co/datasets/newfacade/LeetCodeDataset</a:t>
+            </a:r>
+            <a:endParaRPr lang="en-US" altLang="zh-CN" sz="2000" dirty="0">
+              <a:latin typeface="Calibri" panose="020F0502020204030204" pitchFamily="34" charset="0"/>
+              <a:ea typeface="Calibri" panose="020F0502020204030204" pitchFamily="34" charset="0"/>
+              <a:cs typeface="Calibri" panose="020F0502020204030204" pitchFamily="34" charset="0"/>
+            </a:endParaRPr>
+          </a:p>
+          <a:p>
+            <a:pPr marL="342900" indent="-342900">
+              <a:buFont typeface="Arial" panose="020B0604020202020204" pitchFamily="34" charset="0"/>
+              <a:buChar char="•"/>
+            </a:pPr>
+            <a:r>
+              <a:rPr lang="en-US" altLang="zh-CN" sz="2000" dirty="0">
+                <a:latin typeface="Calibri" panose="020F0502020204030204" pitchFamily="34" charset="0"/>
+                <a:ea typeface="Calibri" panose="020F0502020204030204" pitchFamily="34" charset="0"/>
+                <a:cs typeface="Calibri" panose="020F0502020204030204" pitchFamily="34" charset="0"/>
+              </a:rPr>
+              <a:t>Including easy, medium and hard level coding problem</a:t>
+            </a:r>
+          </a:p>
+          <a:p>
+            <a:pPr marL="342900" indent="-342900">
+              <a:buFont typeface="Arial" panose="020B0604020202020204" pitchFamily="34" charset="0"/>
+              <a:buChar char="•"/>
+            </a:pPr>
+            <a:endParaRPr lang="en-US" altLang="zh-CN" sz="2000" dirty="0">
+              <a:latin typeface="Calibri" panose="020F0502020204030204" pitchFamily="34" charset="0"/>
+              <a:ea typeface="Calibri" panose="020F0502020204030204" pitchFamily="34" charset="0"/>
+              <a:cs typeface="Calibri" panose="020F0502020204030204" pitchFamily="34" charset="0"/>
+            </a:endParaRPr>
+          </a:p>
+          <a:p>
+            <a:endParaRPr lang="en-US" altLang="zh-CN" sz="2000" dirty="0">
+              <a:latin typeface="Calibri" panose="020F0502020204030204" pitchFamily="34" charset="0"/>
+              <a:ea typeface="Calibri" panose="020F0502020204030204" pitchFamily="34" charset="0"/>
+              <a:cs typeface="Calibri" panose="020F0502020204030204" pitchFamily="34" charset="0"/>
+            </a:endParaRPr>
+          </a:p>
+        </p:txBody>
+      </p:sp>
+    </p:spTree>
+    <p:extLst>
+      <p:ext uri="{BB962C8B-B14F-4D97-AF65-F5344CB8AC3E}">
+        <p14:creationId xmlns:p14="http://schemas.microsoft.com/office/powerpoint/2010/main" val="736568813"/>
+      </p:ext>
+    </p:extLst>
+  </p:cSld>
+  <p:clrMapOvr>
+    <a:masterClrMapping/>
+  </p:clrMapOvr>
+</p:sld>
+</file>
+
+<file path=ppt/slides/slide3.xml><?xml version="1.0" encoding="utf-8"?>
+<p:sld xmlns:a="http://schemas.openxmlformats.org/drawingml/2006/main" xmlns:r="http://schemas.openxmlformats.org/officeDocument/2006/relationships" xmlns:p="http://schemas.openxmlformats.org/presentationml/2006/main">
+  <p:cSld>
+    <p:spTree>
+      <p:nvGrpSpPr>
+        <p:cNvPr id="1" name="">
+          <a:extLst>
+            <a:ext uri="{FF2B5EF4-FFF2-40B4-BE49-F238E27FC236}">
               <a16:creationId xmlns:a16="http://schemas.microsoft.com/office/drawing/2014/main" id="{B562F125-BCBE-6730-1D87-EE6F2C7A22BB}"/>
             </a:ext>
           </a:extLst>
@@ -3691,7 +3843,133 @@
 </p:sld>
 </file>
 
-<file path=ppt/slides/slide3.xml><?xml version="1.0" encoding="utf-8"?>
+<file path=ppt/slides/slide4.xml><?xml version="1.0" encoding="utf-8"?>
+<p:sld xmlns:a="http://schemas.openxmlformats.org/drawingml/2006/main" xmlns:r="http://schemas.openxmlformats.org/officeDocument/2006/relationships" xmlns:p="http://schemas.openxmlformats.org/presentationml/2006/main">
+  <p:cSld>
+    <p:spTree>
+      <p:nvGrpSpPr>
+        <p:cNvPr id="1" name="">
+          <a:extLst>
+            <a:ext uri="{FF2B5EF4-FFF2-40B4-BE49-F238E27FC236}">
+              <a16:creationId xmlns:a16="http://schemas.microsoft.com/office/drawing/2014/main" id="{401FB161-1902-535C-7D54-793AC48763FF}"/>
+            </a:ext>
+          </a:extLst>
+        </p:cNvPr>
+        <p:cNvGrpSpPr/>
+        <p:nvPr/>
+      </p:nvGrpSpPr>
+      <p:grpSpPr>
+        <a:xfrm>
+          <a:off x="0" y="0"/>
+          <a:ext cx="0" cy="0"/>
+          <a:chOff x="0" y="0"/>
+          <a:chExt cx="0" cy="0"/>
+        </a:xfrm>
+      </p:grpSpPr>
+      <p:sp>
+        <p:nvSpPr>
+          <p:cNvPr id="2" name="文本框 1">
+            <a:extLst>
+              <a:ext uri="{FF2B5EF4-FFF2-40B4-BE49-F238E27FC236}">
+                <a16:creationId xmlns:a16="http://schemas.microsoft.com/office/drawing/2014/main" id="{3D58B5AB-5ED8-27DB-0AAE-7D2751604FA7}"/>
+              </a:ext>
+            </a:extLst>
+          </p:cNvPr>
+          <p:cNvSpPr txBox="1"/>
+          <p:nvPr/>
+        </p:nvSpPr>
+        <p:spPr>
+          <a:xfrm>
+            <a:off x="421342" y="277906"/>
+            <a:ext cx="11376211" cy="1631216"/>
+          </a:xfrm>
+          <a:prstGeom prst="rect">
+            <a:avLst/>
+          </a:prstGeom>
+          <a:noFill/>
+        </p:spPr>
+        <p:txBody>
+          <a:bodyPr wrap="square" rtlCol="0">
+            <a:spAutoFit/>
+          </a:bodyPr>
+          <a:lstStyle/>
+          <a:p>
+            <a:r>
+              <a:rPr lang="en-US" altLang="zh-CN" sz="2000" dirty="0">
+                <a:latin typeface="Calibri" panose="020F0502020204030204" pitchFamily="34" charset="0"/>
+                <a:ea typeface="Calibri" panose="020F0502020204030204" pitchFamily="34" charset="0"/>
+                <a:cs typeface="Calibri" panose="020F0502020204030204" pitchFamily="34" charset="0"/>
+              </a:rPr>
+              <a:t>DrHall-ECMR3 from FSE25:</a:t>
+            </a:r>
+          </a:p>
+          <a:p>
+            <a:endParaRPr lang="en-US" altLang="zh-CN" sz="2000" dirty="0">
+              <a:latin typeface="Calibri" panose="020F0502020204030204" pitchFamily="34" charset="0"/>
+              <a:ea typeface="Calibri" panose="020F0502020204030204" pitchFamily="34" charset="0"/>
+              <a:cs typeface="Calibri" panose="020F0502020204030204" pitchFamily="34" charset="0"/>
+            </a:endParaRPr>
+          </a:p>
+          <a:p>
+            <a:r>
+              <a:rPr lang="en-US" altLang="zh-CN" sz="2000" dirty="0" err="1">
+                <a:latin typeface="Calibri" panose="020F0502020204030204" pitchFamily="34" charset="0"/>
+                <a:ea typeface="Calibri" panose="020F0502020204030204" pitchFamily="34" charset="0"/>
+                <a:cs typeface="Calibri" panose="020F0502020204030204" pitchFamily="34" charset="0"/>
+              </a:rPr>
+              <a:t>DrHall</a:t>
+            </a:r>
+            <a:r>
+              <a:rPr lang="en-US" altLang="zh-CN" sz="2000" dirty="0">
+                <a:latin typeface="Calibri" panose="020F0502020204030204" pitchFamily="34" charset="0"/>
+                <a:ea typeface="Calibri" panose="020F0502020204030204" pitchFamily="34" charset="0"/>
+                <a:cs typeface="Calibri" panose="020F0502020204030204" pitchFamily="34" charset="0"/>
+              </a:rPr>
+              <a:t> is a hallucination detection and correction method that using MR to perturb the original question without altering its core semantic meaning. (MR -&gt; Question)</a:t>
+            </a:r>
+          </a:p>
+          <a:p>
+            <a:r>
+              <a:rPr lang="en-US" altLang="zh-CN" sz="2000" dirty="0">
+                <a:latin typeface="Calibri" panose="020F0502020204030204" pitchFamily="34" charset="0"/>
+                <a:ea typeface="Calibri" panose="020F0502020204030204" pitchFamily="34" charset="0"/>
+                <a:cs typeface="Calibri" panose="020F0502020204030204" pitchFamily="34" charset="0"/>
+              </a:rPr>
+              <a:t>ECMR3 is the best performance branch in </a:t>
+            </a:r>
+            <a:r>
+              <a:rPr lang="en-US" altLang="zh-CN" sz="2000" dirty="0" err="1">
+                <a:latin typeface="Calibri" panose="020F0502020204030204" pitchFamily="34" charset="0"/>
+                <a:ea typeface="Calibri" panose="020F0502020204030204" pitchFamily="34" charset="0"/>
+                <a:cs typeface="Calibri" panose="020F0502020204030204" pitchFamily="34" charset="0"/>
+              </a:rPr>
+              <a:t>DrHall</a:t>
+            </a:r>
+            <a:r>
+              <a:rPr lang="en-US" altLang="zh-CN" sz="2000" dirty="0">
+                <a:latin typeface="Calibri" panose="020F0502020204030204" pitchFamily="34" charset="0"/>
+                <a:ea typeface="Calibri" panose="020F0502020204030204" pitchFamily="34" charset="0"/>
+                <a:cs typeface="Calibri" panose="020F0502020204030204" pitchFamily="34" charset="0"/>
+              </a:rPr>
+              <a:t>, also can run without external resources.</a:t>
+            </a:r>
+          </a:p>
+        </p:txBody>
+      </p:sp>
+    </p:spTree>
+    <p:extLst>
+      <p:ext uri="{BB962C8B-B14F-4D97-AF65-F5344CB8AC3E}">
+        <p14:creationId xmlns:p14="http://schemas.microsoft.com/office/powerpoint/2010/main" val="2427217633"/>
+      </p:ext>
+    </p:extLst>
+  </p:cSld>
+  <p:clrMapOvr>
+    <a:masterClrMapping/>
+  </p:clrMapOvr>
+</p:sld>
+</file>
+
+<file path=ppt/slides/slide5.xml><?xml version="1.0" encoding="utf-8"?>
 <p:sld xmlns:a="http://schemas.openxmlformats.org/drawingml/2006/main" xmlns:r="http://schemas.openxmlformats.org/officeDocument/2006/relationships" xmlns:p="http://schemas.openxmlformats.org/presentationml/2006/main">
   <p:cSld>
     <p:spTree>
@@ -3930,7 +4208,7 @@
 </p:sld>
 </file>
 
-<file path=ppt/slides/slide4.xml><?xml version="1.0" encoding="utf-8"?>
+<file path=ppt/slides/slide6.xml><?xml version="1.0" encoding="utf-8"?>
 <p:sld xmlns:a="http://schemas.openxmlformats.org/drawingml/2006/main" xmlns:r="http://schemas.openxmlformats.org/officeDocument/2006/relationships" xmlns:p="http://schemas.openxmlformats.org/presentationml/2006/main">
   <p:cSld>
     <p:spTree>
@@ -4137,7 +4415,7 @@
 </p:sld>
 </file>
 
-<file path=ppt/slides/slide5.xml><?xml version="1.0" encoding="utf-8"?>
+<file path=ppt/slides/slide7.xml><?xml version="1.0" encoding="utf-8"?>
 <p:sld xmlns:a="http://schemas.openxmlformats.org/drawingml/2006/main" xmlns:r="http://schemas.openxmlformats.org/officeDocument/2006/relationships" xmlns:p="http://schemas.openxmlformats.org/presentationml/2006/main">
   <p:cSld>
     <p:spTree>
@@ -4291,7 +4569,7 @@
 </p:sld>
 </file>
 
-<file path=ppt/slides/slide6.xml><?xml version="1.0" encoding="utf-8"?>
+<file path=ppt/slides/slide8.xml><?xml version="1.0" encoding="utf-8"?>
 <p:sld xmlns:a="http://schemas.openxmlformats.org/drawingml/2006/main" xmlns:r="http://schemas.openxmlformats.org/officeDocument/2006/relationships" xmlns:p="http://schemas.openxmlformats.org/presentationml/2006/main">
   <p:cSld>
     <p:spTree>
@@ -4329,7 +4607,7 @@
         <p:spPr>
           <a:xfrm>
             <a:off x="421342" y="277906"/>
-            <a:ext cx="6919715" cy="400110"/>
+            <a:ext cx="10217284" cy="2523768"/>
           </a:xfrm>
           <a:prstGeom prst="rect">
             <a:avLst/>
@@ -4343,28 +4621,100 @@
           <a:lstStyle/>
           <a:p>
             <a:r>
+              <a:rPr lang="en-US" altLang="zh-CN" sz="2000" dirty="0" err="1">
+                <a:latin typeface="Calibri" panose="020F0502020204030204" pitchFamily="34" charset="0"/>
+                <a:ea typeface="Calibri" panose="020F0502020204030204" pitchFamily="34" charset="0"/>
+                <a:cs typeface="Calibri" panose="020F0502020204030204" pitchFamily="34" charset="0"/>
+              </a:rPr>
+              <a:t>MutRepair</a:t>
+            </a:r>
+            <a:r>
               <a:rPr lang="en-US" altLang="zh-CN" sz="2000" dirty="0">
                 <a:latin typeface="Calibri" panose="020F0502020204030204" pitchFamily="34" charset="0"/>
                 <a:ea typeface="Calibri" panose="020F0502020204030204" pitchFamily="34" charset="0"/>
                 <a:cs typeface="Calibri" panose="020F0502020204030204" pitchFamily="34" charset="0"/>
               </a:rPr>
-              <a:t>Experiment results of </a:t>
-            </a:r>
-            <a:r>
-              <a:rPr lang="en-US" altLang="zh-CN" sz="2000" dirty="0" err="1">
-                <a:latin typeface="Calibri" panose="020F0502020204030204" pitchFamily="34" charset="0"/>
-                <a:ea typeface="Calibri" panose="020F0502020204030204" pitchFamily="34" charset="0"/>
-                <a:cs typeface="Calibri" panose="020F0502020204030204" pitchFamily="34" charset="0"/>
-              </a:rPr>
-              <a:t>MutRepair</a:t>
-            </a:r>
+              <a:t> without Metamorphic Relations:</a:t>
+            </a:r>
+          </a:p>
+          <a:p>
+            <a:endParaRPr lang="en-US" altLang="zh-CN" sz="2000" dirty="0">
+              <a:latin typeface="Calibri" panose="020F0502020204030204" pitchFamily="34" charset="0"/>
+              <a:ea typeface="Calibri" panose="020F0502020204030204" pitchFamily="34" charset="0"/>
+              <a:cs typeface="Calibri" panose="020F0502020204030204" pitchFamily="34" charset="0"/>
+            </a:endParaRPr>
+          </a:p>
+          <a:p>
             <a:r>
               <a:rPr lang="en-US" altLang="zh-CN" sz="2000" dirty="0">
                 <a:latin typeface="Calibri" panose="020F0502020204030204" pitchFamily="34" charset="0"/>
                 <a:ea typeface="Calibri" panose="020F0502020204030204" pitchFamily="34" charset="0"/>
                 <a:cs typeface="Calibri" panose="020F0502020204030204" pitchFamily="34" charset="0"/>
               </a:rPr>
-              <a:t> without Metamorphic Relation:</a:t>
+              <a:t>Step 1. Mutation generation without MR</a:t>
+            </a:r>
+          </a:p>
+          <a:p>
+            <a:r>
+              <a:rPr lang="en-US" altLang="zh-CN" dirty="0">
+                <a:latin typeface="Calibri" panose="020F0502020204030204" pitchFamily="34" charset="0"/>
+                <a:ea typeface="Calibri" panose="020F0502020204030204" pitchFamily="34" charset="0"/>
+                <a:cs typeface="Calibri" panose="020F0502020204030204" pitchFamily="34" charset="0"/>
+              </a:rPr>
+              <a:t>This step works just like </a:t>
+            </a:r>
+            <a:r>
+              <a:rPr lang="en-US" altLang="zh-CN" dirty="0" err="1">
+                <a:latin typeface="Calibri" panose="020F0502020204030204" pitchFamily="34" charset="0"/>
+                <a:ea typeface="Calibri" panose="020F0502020204030204" pitchFamily="34" charset="0"/>
+                <a:cs typeface="Calibri" panose="020F0502020204030204" pitchFamily="34" charset="0"/>
+              </a:rPr>
+              <a:t>SelfCheckGPT</a:t>
+            </a:r>
+            <a:r>
+              <a:rPr lang="en-US" altLang="zh-CN" dirty="0">
+                <a:latin typeface="Calibri" panose="020F0502020204030204" pitchFamily="34" charset="0"/>
+                <a:ea typeface="Calibri" panose="020F0502020204030204" pitchFamily="34" charset="0"/>
+                <a:cs typeface="Calibri" panose="020F0502020204030204" pitchFamily="34" charset="0"/>
+              </a:rPr>
+              <a:t>, the mutations are generated through multi-runs with same question.</a:t>
+            </a:r>
+          </a:p>
+          <a:p>
+            <a:endParaRPr lang="en-US" altLang="zh-CN" sz="2000" dirty="0">
+              <a:latin typeface="Calibri" panose="020F0502020204030204" pitchFamily="34" charset="0"/>
+              <a:ea typeface="Calibri" panose="020F0502020204030204" pitchFamily="34" charset="0"/>
+              <a:cs typeface="Calibri" panose="020F0502020204030204" pitchFamily="34" charset="0"/>
+            </a:endParaRPr>
+          </a:p>
+          <a:p>
+            <a:r>
+              <a:rPr lang="en-US" altLang="zh-CN" sz="2000" dirty="0">
+                <a:latin typeface="Calibri" panose="020F0502020204030204" pitchFamily="34" charset="0"/>
+                <a:ea typeface="Calibri" panose="020F0502020204030204" pitchFamily="34" charset="0"/>
+                <a:cs typeface="Calibri" panose="020F0502020204030204" pitchFamily="34" charset="0"/>
+              </a:rPr>
+              <a:t>Step 2: LLM self-check with fault-assumption-injected prompt</a:t>
+            </a:r>
+          </a:p>
+          <a:p>
+            <a:r>
+              <a:rPr lang="en-US" altLang="zh-CN" sz="2000" dirty="0">
+                <a:latin typeface="Calibri" panose="020F0502020204030204" pitchFamily="34" charset="0"/>
+                <a:ea typeface="Calibri" panose="020F0502020204030204" pitchFamily="34" charset="0"/>
+                <a:cs typeface="Calibri" panose="020F0502020204030204" pitchFamily="34" charset="0"/>
+              </a:rPr>
+              <a:t>Step 3: Pairwise ranking by LLM</a:t>
+            </a:r>
+          </a:p>
+          <a:p>
+            <a:r>
+              <a:rPr lang="en-US" altLang="zh-CN" sz="2000" dirty="0">
+                <a:latin typeface="Calibri" panose="020F0502020204030204" pitchFamily="34" charset="0"/>
+                <a:ea typeface="Calibri" panose="020F0502020204030204" pitchFamily="34" charset="0"/>
+                <a:cs typeface="Calibri" panose="020F0502020204030204" pitchFamily="34" charset="0"/>
+              </a:rPr>
+              <a:t>Step 4: Final output</a:t>
             </a:r>
           </a:p>
         </p:txBody>
